--- a/12/answers/Class12_rp17-7B_02.pptx
+++ b/12/answers/Class12_rp17-7B_02.pptx
@@ -2,16 +2,16 @@
 <file path=ppt/presentation.xml><?xml version="1.0" encoding="utf-8"?>
 <p:presentation xmlns:p="http://schemas.openxmlformats.org/presentationml/2006/main">
   <p:sldMasterIdLst>
-    <p:sldMasterId xmlns:r="http://schemas.openxmlformats.org/officeDocument/2006/relationships" id="2147483648" r:id="R84d8752767394206"/>
+    <p:sldMasterId xmlns:r="http://schemas.openxmlformats.org/officeDocument/2006/relationships" id="2147483648" r:id="Rb39374ad9df8432f"/>
   </p:sldMasterIdLst>
   <p:notesMasterIdLst>
-    <p:notesMasterId xmlns:r="http://schemas.openxmlformats.org/officeDocument/2006/relationships" r:id="R348874aee9cb4973"/>
+    <p:notesMasterId xmlns:r="http://schemas.openxmlformats.org/officeDocument/2006/relationships" r:id="Rdd39883770ea4089"/>
   </p:notesMasterIdLst>
   <p:sldIdLst>
-    <p:sldId xmlns:r="http://schemas.openxmlformats.org/officeDocument/2006/relationships" id="256" r:id="Ra568f4f728364632"/>
-    <p:sldId xmlns:r="http://schemas.openxmlformats.org/officeDocument/2006/relationships" id="257" r:id="Rd9d5d55594f64df7"/>
-    <p:sldId xmlns:r="http://schemas.openxmlformats.org/officeDocument/2006/relationships" id="258" r:id="Racf6d0e7b4a84f4b"/>
-    <p:sldId xmlns:r="http://schemas.openxmlformats.org/officeDocument/2006/relationships" id="259" r:id="R0a827a2fa7ad446d"/>
+    <p:sldId xmlns:r="http://schemas.openxmlformats.org/officeDocument/2006/relationships" id="256" r:id="Re648539080ee4f02"/>
+    <p:sldId xmlns:r="http://schemas.openxmlformats.org/officeDocument/2006/relationships" id="257" r:id="R9c678da5217e44da"/>
+    <p:sldId xmlns:r="http://schemas.openxmlformats.org/officeDocument/2006/relationships" id="258" r:id="Rf00cac560fb14479"/>
+    <p:sldId xmlns:r="http://schemas.openxmlformats.org/officeDocument/2006/relationships" id="259" r:id="Rd458edbef22e432c"/>
   </p:sldIdLst>
   <p:sldSz cx="12192000" cy="6858000"/>
   <p:notesSz cx="6858000" cy="9144000"/>
@@ -802,7 +802,7 @@
   </p:cSld>
   <p:clrMap bg1="lt1" tx1="dk1" bg2="lt2" tx2="dk2" accent1="accent1" accent2="accent2" accent3="accent3" accent4="accent4" accent5="accent5" accent6="accent6" hlink="hlink" folHlink="folHlink"/>
   <p:sldLayoutIdLst>
-    <p:sldLayoutId xmlns:r="http://schemas.openxmlformats.org/officeDocument/2006/relationships" id="2147483649" r:id="Rffb6820dff30422f"/>
+    <p:sldLayoutId xmlns:r="http://schemas.openxmlformats.org/officeDocument/2006/relationships" id="2147483649" r:id="Rbdb81121eaa245f1"/>
   </p:sldLayoutIdLst>
   <p:txStyles>
     <p:titleStyle>
@@ -1353,7 +1353,7 @@
           <p:cNvPr id="1" name="">
             <a:extLst xmlns:a="http://schemas.openxmlformats.org/drawingml/2006/main">
               <a:ext uri="{FF2B5EF4-FFF2-40B4-BE49-F238E27FC236}">
-                <a16:creationId xmlns:a16="http://schemas.microsoft.com/office/drawing/2014/main" id="{74A169C8-AC37-4C8A-B92C-AC95F6276276}"/>
+                <a16:creationId xmlns:a16="http://schemas.microsoft.com/office/drawing/2014/main" id="{99D26873-D8C6-41A5-8D8A-DB21C8CBBA20}"/>
               </a:ext>
             </a:extLst>
           </p:cNvPr>
@@ -1403,7 +1403,7 @@
           <p:cNvPr id="2" name="">
             <a:extLst xmlns:a="http://schemas.openxmlformats.org/drawingml/2006/main">
               <a:ext uri="{FF2B5EF4-FFF2-40B4-BE49-F238E27FC236}">
-                <a16:creationId xmlns:a16="http://schemas.microsoft.com/office/drawing/2014/main" id="{808AF3CB-C8FA-43B7-8E52-7E31DB444DBD}"/>
+                <a16:creationId xmlns:a16="http://schemas.microsoft.com/office/drawing/2014/main" id="{9E65437D-8955-4B8F-AA38-7F1B6431A56C}"/>
               </a:ext>
             </a:extLst>
           </p:cNvPr>
@@ -1453,7 +1453,7 @@
           <p:cNvPr id="3" name="">
             <a:extLst xmlns:a="http://schemas.openxmlformats.org/drawingml/2006/main">
               <a:ext uri="{FF2B5EF4-FFF2-40B4-BE49-F238E27FC236}">
-                <a16:creationId xmlns:a16="http://schemas.microsoft.com/office/drawing/2014/main" id="{FF63EB05-54E9-4E42-AEA2-D505AF6E13F4}"/>
+                <a16:creationId xmlns:a16="http://schemas.microsoft.com/office/drawing/2014/main" id="{61FA7F48-4500-410B-9AD2-858A77393BC0}"/>
               </a:ext>
             </a:extLst>
           </p:cNvPr>
@@ -1488,7 +1488,7 @@
           <p:cNvPr id="4" name="">
             <a:extLst xmlns:a="http://schemas.openxmlformats.org/drawingml/2006/main">
               <a:ext uri="{FF2B5EF4-FFF2-40B4-BE49-F238E27FC236}">
-                <a16:creationId xmlns:a16="http://schemas.microsoft.com/office/drawing/2014/main" id="{0A35D25E-8559-4B58-A65E-0CED9D4CC865}"/>
+                <a16:creationId xmlns:a16="http://schemas.microsoft.com/office/drawing/2014/main" id="{1BCCA02E-0A4C-4635-B542-C47F117BDCBF}"/>
               </a:ext>
             </a:extLst>
           </p:cNvPr>
@@ -1521,7 +1521,7 @@
           <p:cNvPr id="5" name="">
             <a:extLst xmlns:a="http://schemas.openxmlformats.org/drawingml/2006/main">
               <a:ext uri="{FF2B5EF4-FFF2-40B4-BE49-F238E27FC236}">
-                <a16:creationId xmlns:a16="http://schemas.microsoft.com/office/drawing/2014/main" id="{20EBC27C-588E-42E9-8DEB-78CEE95E54A0}"/>
+                <a16:creationId xmlns:a16="http://schemas.microsoft.com/office/drawing/2014/main" id="{E0684A71-7149-4446-8F70-225569012A36}"/>
               </a:ext>
             </a:extLst>
           </p:cNvPr>
@@ -1571,7 +1571,7 @@
           <p:cNvPr id="6" name="">
             <a:extLst xmlns:a="http://schemas.openxmlformats.org/drawingml/2006/main">
               <a:ext uri="{FF2B5EF4-FFF2-40B4-BE49-F238E27FC236}">
-                <a16:creationId xmlns:a16="http://schemas.microsoft.com/office/drawing/2014/main" id="{00DA98DF-98C9-499D-AC7F-85156FF5DFDC}"/>
+                <a16:creationId xmlns:a16="http://schemas.microsoft.com/office/drawing/2014/main" id="{E501738E-6265-45F2-9C3C-C6D9C668EBC0}"/>
               </a:ext>
             </a:extLst>
           </p:cNvPr>
@@ -1621,7 +1621,7 @@
           <p:cNvPr id="7" name="">
             <a:extLst xmlns:a="http://schemas.openxmlformats.org/drawingml/2006/main">
               <a:ext uri="{FF2B5EF4-FFF2-40B4-BE49-F238E27FC236}">
-                <a16:creationId xmlns:a16="http://schemas.microsoft.com/office/drawing/2014/main" id="{77FFD436-BA4C-40AC-9AA7-EF7F380A9405}"/>
+                <a16:creationId xmlns:a16="http://schemas.microsoft.com/office/drawing/2014/main" id="{218F43FD-1D27-45FB-BD46-CBC1BB46FF4B}"/>
               </a:ext>
             </a:extLst>
           </p:cNvPr>
@@ -1656,7 +1656,7 @@
           <p:cNvPr id="8" name="">
             <a:extLst xmlns:a="http://schemas.openxmlformats.org/drawingml/2006/main">
               <a:ext uri="{FF2B5EF4-FFF2-40B4-BE49-F238E27FC236}">
-                <a16:creationId xmlns:a16="http://schemas.microsoft.com/office/drawing/2014/main" id="{8ED8EE32-B4FD-4E02-92EE-F45BD5FE4C23}"/>
+                <a16:creationId xmlns:a16="http://schemas.microsoft.com/office/drawing/2014/main" id="{B8884D84-AEF9-4212-8E26-B2A76386B66B}"/>
               </a:ext>
             </a:extLst>
           </p:cNvPr>
@@ -1689,7 +1689,7 @@
           <p:cNvPr id="9" name="">
             <a:extLst xmlns:a="http://schemas.openxmlformats.org/drawingml/2006/main">
               <a:ext uri="{FF2B5EF4-FFF2-40B4-BE49-F238E27FC236}">
-                <a16:creationId xmlns:a16="http://schemas.microsoft.com/office/drawing/2014/main" id="{6C9547BD-8083-4CF3-8191-603648CC8FCA}"/>
+                <a16:creationId xmlns:a16="http://schemas.microsoft.com/office/drawing/2014/main" id="{AE5BAB7E-37ED-4206-BF6D-2190464881C8}"/>
               </a:ext>
             </a:extLst>
           </p:cNvPr>
@@ -1739,7 +1739,7 @@
           <p:cNvPr id="10" name="">
             <a:extLst xmlns:a="http://schemas.openxmlformats.org/drawingml/2006/main">
               <a:ext uri="{FF2B5EF4-FFF2-40B4-BE49-F238E27FC236}">
-                <a16:creationId xmlns:a16="http://schemas.microsoft.com/office/drawing/2014/main" id="{9CC12E00-4F5D-4A9D-ABDC-8BF0999419C9}"/>
+                <a16:creationId xmlns:a16="http://schemas.microsoft.com/office/drawing/2014/main" id="{2069F41C-B362-43C5-A457-4897207B9D0A}"/>
               </a:ext>
             </a:extLst>
           </p:cNvPr>
@@ -1789,7 +1789,7 @@
           <p:cNvPr id="11" name="">
             <a:extLst xmlns:a="http://schemas.openxmlformats.org/drawingml/2006/main">
               <a:ext uri="{FF2B5EF4-FFF2-40B4-BE49-F238E27FC236}">
-                <a16:creationId xmlns:a16="http://schemas.microsoft.com/office/drawing/2014/main" id="{42F3E19E-3586-4885-8D3F-5F0FA613C462}"/>
+                <a16:creationId xmlns:a16="http://schemas.microsoft.com/office/drawing/2014/main" id="{D9E391C1-693E-4DA8-9DBB-FC0DBC1A9390}"/>
               </a:ext>
             </a:extLst>
           </p:cNvPr>
@@ -1824,7 +1824,7 @@
           <p:cNvPr id="12" name="">
             <a:extLst xmlns:a="http://schemas.openxmlformats.org/drawingml/2006/main">
               <a:ext uri="{FF2B5EF4-FFF2-40B4-BE49-F238E27FC236}">
-                <a16:creationId xmlns:a16="http://schemas.microsoft.com/office/drawing/2014/main" id="{9830226A-115C-432F-B44C-77A08F1DC727}"/>
+                <a16:creationId xmlns:a16="http://schemas.microsoft.com/office/drawing/2014/main" id="{51E0D5B6-E650-495F-BBBB-C2F9793C1FEF}"/>
               </a:ext>
             </a:extLst>
           </p:cNvPr>
@@ -1857,7 +1857,7 @@
           <p:cNvPr id="13" name="">
             <a:extLst xmlns:a="http://schemas.openxmlformats.org/drawingml/2006/main">
               <a:ext uri="{FF2B5EF4-FFF2-40B4-BE49-F238E27FC236}">
-                <a16:creationId xmlns:a16="http://schemas.microsoft.com/office/drawing/2014/main" id="{4135B09C-0AC3-48A1-81D3-C38CB5363436}"/>
+                <a16:creationId xmlns:a16="http://schemas.microsoft.com/office/drawing/2014/main" id="{F8301E29-CE88-4EF0-859B-ED110208A9BD}"/>
               </a:ext>
             </a:extLst>
           </p:cNvPr>
@@ -1907,7 +1907,7 @@
           <p:cNvPr id="14" name="">
             <a:extLst xmlns:a="http://schemas.openxmlformats.org/drawingml/2006/main">
               <a:ext uri="{FF2B5EF4-FFF2-40B4-BE49-F238E27FC236}">
-                <a16:creationId xmlns:a16="http://schemas.microsoft.com/office/drawing/2014/main" id="{608901D3-7F7E-4740-B01F-25324ACFBA86}"/>
+                <a16:creationId xmlns:a16="http://schemas.microsoft.com/office/drawing/2014/main" id="{1F61DE2F-1681-4E51-927D-F982EDC93719}"/>
               </a:ext>
             </a:extLst>
           </p:cNvPr>
@@ -1957,7 +1957,7 @@
           <p:cNvPr id="15" name="">
             <a:extLst xmlns:a="http://schemas.openxmlformats.org/drawingml/2006/main">
               <a:ext uri="{FF2B5EF4-FFF2-40B4-BE49-F238E27FC236}">
-                <a16:creationId xmlns:a16="http://schemas.microsoft.com/office/drawing/2014/main" id="{4F68953A-9013-4706-8CC8-375A1DC0B662}"/>
+                <a16:creationId xmlns:a16="http://schemas.microsoft.com/office/drawing/2014/main" id="{534B48A5-13F0-401B-8631-7B1042FE4652}"/>
               </a:ext>
             </a:extLst>
           </p:cNvPr>
@@ -2045,7 +2045,7 @@
           <p:nvPr/>
         </p:nvPicPr>
         <p:blipFill>
-          <a:blip xmlns:r="http://schemas.openxmlformats.org/officeDocument/2006/relationships" xmlns:a="http://schemas.openxmlformats.org/drawingml/2006/main" r:embed="R19187c2822f64816"/>
+          <a:blip xmlns:r="http://schemas.openxmlformats.org/officeDocument/2006/relationships" xmlns:a="http://schemas.openxmlformats.org/drawingml/2006/main" r:embed="R7bfdd8812e4542e7"/>
           <a:stretch xmlns:a="http://schemas.openxmlformats.org/drawingml/2006/main"/>
         </p:blipFill>
         <p:spPr>
@@ -2063,7 +2063,7 @@
           <p:cNvPr id="17" name="">
             <a:extLst xmlns:a="http://schemas.openxmlformats.org/drawingml/2006/main">
               <a:ext uri="{FF2B5EF4-FFF2-40B4-BE49-F238E27FC236}">
-                <a16:creationId xmlns:a16="http://schemas.microsoft.com/office/drawing/2014/main" id="{6643734C-439D-4041-99E2-F0AE672BD9AA}"/>
+                <a16:creationId xmlns:a16="http://schemas.microsoft.com/office/drawing/2014/main" id="{BB6B6C05-4247-4733-BAA0-E71470BAF3B7}"/>
               </a:ext>
             </a:extLst>
           </p:cNvPr>
@@ -2111,7 +2111,7 @@
     </p:spTree>
     <p:extLst>
       <p:ext uri="{BB962C8B-B14F-4D97-AF65-F5344CB8AC3E}">
-        <p14:creationId xmlns:p14="http://schemas.microsoft.com/office/powerpoint/2010/main" val="2104545319"/>
+        <p14:creationId xmlns:p14="http://schemas.microsoft.com/office/powerpoint/2010/main" val="651383910"/>
       </p:ext>
     </p:extLst>
   </p:cSld>
@@ -2142,7 +2142,7 @@
           <p:cNvPr id="1" name="">
             <a:extLst xmlns:a="http://schemas.openxmlformats.org/drawingml/2006/main">
               <a:ext uri="{FF2B5EF4-FFF2-40B4-BE49-F238E27FC236}">
-                <a16:creationId xmlns:a16="http://schemas.microsoft.com/office/drawing/2014/main" id="{49FCC569-CD8B-42ED-9A18-E37F21CA421C}"/>
+                <a16:creationId xmlns:a16="http://schemas.microsoft.com/office/drawing/2014/main" id="{242CE71D-D7A8-4B75-BD92-B12DA8353097}"/>
               </a:ext>
             </a:extLst>
           </p:cNvPr>
@@ -2192,7 +2192,7 @@
           <p:cNvPr id="2" name="">
             <a:extLst xmlns:a="http://schemas.openxmlformats.org/drawingml/2006/main">
               <a:ext uri="{FF2B5EF4-FFF2-40B4-BE49-F238E27FC236}">
-                <a16:creationId xmlns:a16="http://schemas.microsoft.com/office/drawing/2014/main" id="{9E6A6B01-F9EB-4A78-9AA9-2A475C1D191E}"/>
+                <a16:creationId xmlns:a16="http://schemas.microsoft.com/office/drawing/2014/main" id="{4B0162F4-53DC-4322-BD7B-48C23143A15C}"/>
               </a:ext>
             </a:extLst>
           </p:cNvPr>
@@ -2846,7 +2846,7 @@
           <p:nvPr/>
         </p:nvPicPr>
         <p:blipFill>
-          <a:blip xmlns:r="http://schemas.openxmlformats.org/officeDocument/2006/relationships" xmlns:a="http://schemas.openxmlformats.org/drawingml/2006/main" r:embed="Rf4dd2d8788254fc9"/>
+          <a:blip xmlns:r="http://schemas.openxmlformats.org/officeDocument/2006/relationships" xmlns:a="http://schemas.openxmlformats.org/drawingml/2006/main" r:embed="R43684715a1c94bf2"/>
           <a:stretch xmlns:a="http://schemas.openxmlformats.org/drawingml/2006/main"/>
         </p:blipFill>
         <p:spPr>
@@ -2864,7 +2864,7 @@
           <p:cNvPr id="5" name="">
             <a:extLst xmlns:a="http://schemas.openxmlformats.org/drawingml/2006/main">
               <a:ext uri="{FF2B5EF4-FFF2-40B4-BE49-F238E27FC236}">
-                <a16:creationId xmlns:a16="http://schemas.microsoft.com/office/drawing/2014/main" id="{B70A119A-374B-4F2F-B75E-4AB3446CE0DD}"/>
+                <a16:creationId xmlns:a16="http://schemas.microsoft.com/office/drawing/2014/main" id="{FFF34450-FB0A-47C9-A665-3B220E8CF136}"/>
               </a:ext>
             </a:extLst>
           </p:cNvPr>
@@ -2931,7 +2931,7 @@
           <p:cNvPr id="6" name="">
             <a:extLst xmlns:a="http://schemas.openxmlformats.org/drawingml/2006/main">
               <a:ext uri="{FF2B5EF4-FFF2-40B4-BE49-F238E27FC236}">
-                <a16:creationId xmlns:a16="http://schemas.microsoft.com/office/drawing/2014/main" id="{1024E18C-023B-4D58-9F87-9AC082E2BC13}"/>
+                <a16:creationId xmlns:a16="http://schemas.microsoft.com/office/drawing/2014/main" id="{E6D535B1-7E8D-4486-8BFD-53DF60899628}"/>
               </a:ext>
             </a:extLst>
           </p:cNvPr>
@@ -2979,7 +2979,7 @@
     </p:spTree>
     <p:extLst>
       <p:ext uri="{BB962C8B-B14F-4D97-AF65-F5344CB8AC3E}">
-        <p14:creationId xmlns:p14="http://schemas.microsoft.com/office/powerpoint/2010/main" val="1026780836"/>
+        <p14:creationId xmlns:p14="http://schemas.microsoft.com/office/powerpoint/2010/main" val="1415471312"/>
       </p:ext>
     </p:extLst>
   </p:cSld>
@@ -3010,7 +3010,7 @@
           <p:cNvPr id="1" name="">
             <a:extLst xmlns:a="http://schemas.openxmlformats.org/drawingml/2006/main">
               <a:ext uri="{FF2B5EF4-FFF2-40B4-BE49-F238E27FC236}">
-                <a16:creationId xmlns:a16="http://schemas.microsoft.com/office/drawing/2014/main" id="{9D39069C-6AE9-4A70-9D48-D6BE29C882B2}"/>
+                <a16:creationId xmlns:a16="http://schemas.microsoft.com/office/drawing/2014/main" id="{07954F97-818F-4AE5-8357-4056BEFA2DFA}"/>
               </a:ext>
             </a:extLst>
           </p:cNvPr>
@@ -3060,7 +3060,7 @@
           <p:cNvPr id="2" name="">
             <a:extLst xmlns:a="http://schemas.openxmlformats.org/drawingml/2006/main">
               <a:ext uri="{FF2B5EF4-FFF2-40B4-BE49-F238E27FC236}">
-                <a16:creationId xmlns:a16="http://schemas.microsoft.com/office/drawing/2014/main" id="{C3199068-FC3D-4A3F-BCCC-AB0DB83CB19C}"/>
+                <a16:creationId xmlns:a16="http://schemas.microsoft.com/office/drawing/2014/main" id="{6F9E74D7-3330-4E6A-A795-21B86F43E07E}"/>
               </a:ext>
             </a:extLst>
           </p:cNvPr>
@@ -3114,7 +3114,7 @@
           <p:nvPr/>
         </p:nvPicPr>
         <p:blipFill>
-          <a:blip xmlns:r="http://schemas.openxmlformats.org/officeDocument/2006/relationships" xmlns:a="http://schemas.openxmlformats.org/drawingml/2006/main" r:embed="R398566ee735b4fa8"/>
+          <a:blip xmlns:r="http://schemas.openxmlformats.org/officeDocument/2006/relationships" xmlns:a="http://schemas.openxmlformats.org/drawingml/2006/main" r:embed="R921265c1b1084460"/>
           <a:stretch xmlns:a="http://schemas.openxmlformats.org/drawingml/2006/main"/>
         </p:blipFill>
         <p:spPr>
@@ -3136,7 +3136,7 @@
           <p:nvPr/>
         </p:nvPicPr>
         <p:blipFill>
-          <a:blip xmlns:r="http://schemas.openxmlformats.org/officeDocument/2006/relationships" xmlns:a="http://schemas.openxmlformats.org/drawingml/2006/main" r:embed="Ra817381032794884"/>
+          <a:blip xmlns:r="http://schemas.openxmlformats.org/officeDocument/2006/relationships" xmlns:a="http://schemas.openxmlformats.org/drawingml/2006/main" r:embed="R53e4fad1b5804cac"/>
           <a:stretch xmlns:a="http://schemas.openxmlformats.org/drawingml/2006/main"/>
         </p:blipFill>
         <p:spPr>
@@ -3154,7 +3154,7 @@
           <p:cNvPr id="5" name="">
             <a:extLst xmlns:a="http://schemas.openxmlformats.org/drawingml/2006/main">
               <a:ext uri="{FF2B5EF4-FFF2-40B4-BE49-F238E27FC236}">
-                <a16:creationId xmlns:a16="http://schemas.microsoft.com/office/drawing/2014/main" id="{BF3B94D9-DF6F-4ACA-B43A-99FFA8C1F9A4}"/>
+                <a16:creationId xmlns:a16="http://schemas.microsoft.com/office/drawing/2014/main" id="{769B3320-210A-4E85-9F74-5CF496A83D3C}"/>
               </a:ext>
             </a:extLst>
           </p:cNvPr>
@@ -3204,7 +3204,7 @@
           <p:cNvPr id="6" name="">
             <a:extLst xmlns:a="http://schemas.openxmlformats.org/drawingml/2006/main">
               <a:ext uri="{FF2B5EF4-FFF2-40B4-BE49-F238E27FC236}">
-                <a16:creationId xmlns:a16="http://schemas.microsoft.com/office/drawing/2014/main" id="{49C87613-7554-4207-89A3-DF262EB62493}"/>
+                <a16:creationId xmlns:a16="http://schemas.microsoft.com/office/drawing/2014/main" id="{1EBA8ECC-5E00-4057-9E0C-DDDCD41531BF}"/>
               </a:ext>
             </a:extLst>
           </p:cNvPr>
@@ -3252,7 +3252,7 @@
     </p:spTree>
     <p:extLst>
       <p:ext uri="{BB962C8B-B14F-4D97-AF65-F5344CB8AC3E}">
-        <p14:creationId xmlns:p14="http://schemas.microsoft.com/office/powerpoint/2010/main" val="58653574"/>
+        <p14:creationId xmlns:p14="http://schemas.microsoft.com/office/powerpoint/2010/main" val="292168903"/>
       </p:ext>
     </p:extLst>
   </p:cSld>
@@ -3283,7 +3283,7 @@
           <p:cNvPr id="1" name="">
             <a:extLst xmlns:a="http://schemas.openxmlformats.org/drawingml/2006/main">
               <a:ext uri="{FF2B5EF4-FFF2-40B4-BE49-F238E27FC236}">
-                <a16:creationId xmlns:a16="http://schemas.microsoft.com/office/drawing/2014/main" id="{16BC2151-C4E0-4F15-AA6B-E580252A388A}"/>
+                <a16:creationId xmlns:a16="http://schemas.microsoft.com/office/drawing/2014/main" id="{FCB9F40C-62DA-49E2-B459-6767C4F6769C}"/>
               </a:ext>
             </a:extLst>
           </p:cNvPr>
@@ -3333,7 +3333,7 @@
           <p:cNvPr id="2" name="">
             <a:extLst xmlns:a="http://schemas.openxmlformats.org/drawingml/2006/main">
               <a:ext uri="{FF2B5EF4-FFF2-40B4-BE49-F238E27FC236}">
-                <a16:creationId xmlns:a16="http://schemas.microsoft.com/office/drawing/2014/main" id="{0DA4953B-7A2C-4D44-8960-3A63477187B8}"/>
+                <a16:creationId xmlns:a16="http://schemas.microsoft.com/office/drawing/2014/main" id="{96723DEA-3EE0-4C9D-BFD4-DA6DF7549F3F}"/>
               </a:ext>
             </a:extLst>
           </p:cNvPr>
@@ -3383,7 +3383,7 @@
           <p:cNvPr id="3" name="">
             <a:extLst xmlns:a="http://schemas.openxmlformats.org/drawingml/2006/main">
               <a:ext uri="{FF2B5EF4-FFF2-40B4-BE49-F238E27FC236}">
-                <a16:creationId xmlns:a16="http://schemas.microsoft.com/office/drawing/2014/main" id="{A4BC56D6-AE9B-49C8-9D00-C3881650899B}"/>
+                <a16:creationId xmlns:a16="http://schemas.microsoft.com/office/drawing/2014/main" id="{6FA2E0EB-CDF5-4D66-88C8-DAC28E9FA29C}"/>
               </a:ext>
             </a:extLst>
           </p:cNvPr>
@@ -4190,7 +4190,7 @@
           <p:cNvPr id="6" name="">
             <a:extLst xmlns:a="http://schemas.openxmlformats.org/drawingml/2006/main">
               <a:ext uri="{FF2B5EF4-FFF2-40B4-BE49-F238E27FC236}">
-                <a16:creationId xmlns:a16="http://schemas.microsoft.com/office/drawing/2014/main" id="{F1685524-518C-4C9A-921D-75CA68CF30B4}"/>
+                <a16:creationId xmlns:a16="http://schemas.microsoft.com/office/drawing/2014/main" id="{80C76325-CD12-4D08-9347-56518052F831}"/>
               </a:ext>
             </a:extLst>
           </p:cNvPr>
@@ -4238,7 +4238,7 @@
     </p:spTree>
     <p:extLst>
       <p:ext uri="{BB962C8B-B14F-4D97-AF65-F5344CB8AC3E}">
-        <p14:creationId xmlns:p14="http://schemas.microsoft.com/office/powerpoint/2010/main" val="1770480814"/>
+        <p14:creationId xmlns:p14="http://schemas.microsoft.com/office/powerpoint/2010/main" val="594681804"/>
       </p:ext>
     </p:extLst>
   </p:cSld>
